--- a/media/resources/files/EkiOrunduuOnduktar_Koboytuu_UnaaJarysh.pptx
+++ b/media/resources/files/EkiOrunduuOnduktar_Koboytuu_UnaaJarysh.pptx
@@ -5900,7 +5900,7 @@
                   <a:schemeClr val="tx1"/>
                 </a:solidFill>
               </a:rPr>
-              <a:t>Answer</a:t>
+              <a:t>Жооп</a:t>
             </a:r>
           </a:p>
         </p:txBody>
@@ -11121,7 +11121,7 @@
                 <a:latin typeface="Impact" panose="020B0806030902050204" pitchFamily="34" charset="0"/>
                 <a:ea typeface="굴림" panose="020B0600000101010101" pitchFamily="34" charset="-127"/>
               </a:rPr>
-              <a:t>START</a:t>
+              <a:t>Башта</a:t>
             </a:r>
             <a:endParaRPr lang="en-US" altLang="en-US" sz="8862" dirty="0">
               <a:solidFill>
@@ -12292,7 +12292,7 @@
                 </a:solidFill>
                 <a:latin typeface="Calibri" panose="020F0502020204030204"/>
               </a:rPr>
-              <a:t>Турдуу пикирлер учун ыраазычылык билдиребиз.</a:t>
+              <a:t>Түрдүү пикирлер үчүн ыраазычылык билдиребиз.</a:t>
             </a:r>
           </a:p>
           <a:p>

--- a/media/resources/files/EkiOrunduuOnduktar_Koboytuu_UnaaJarysh.pptx
+++ b/media/resources/files/EkiOrunduuOnduktar_Koboytuu_UnaaJarysh.pptx
@@ -4067,7 +4067,7 @@
                 </a:solidFill>
                 <a:latin typeface="Calibri" panose="020F0502020204030204"/>
               </a:rPr>
-              <a:t>Суроону тандоо үчүн ак кутучаны басыңыз/тийиңиз. Тиешелүү суроого өтүү үчүн номерди басыңыз.</a:t>
+              <a:t>Суроону тандоо үчүн ак кутучаны басыңыз. Ошол суроого өтүү үчүн номерди басыңыз.</a:t>
             </a:r>
           </a:p>
           <a:p>
@@ -4101,7 +4101,7 @@
                 </a:solidFill>
                 <a:latin typeface="Calibri" panose="020F0502020204030204"/>
               </a:rPr>
-              <a:t>Команданын унаасын чыкылдатып, аны бир орун алдыга жылдырыңыз. Жеңүүчү анимация бар</a:t>
+              <a:t>Команданын унаасын басып, бир орун алдыга жылдырыңыз. Жеңгенде анимация чыгат.</a:t>
             </a:r>
           </a:p>
           <a:p>
@@ -4761,7 +4761,7 @@
                   <a:schemeClr val="tx1"/>
                 </a:solidFill>
               </a:rPr>
-              <a:t>0.0209</a:t>
+              <a:t>0,0209</a:t>
             </a:r>
             <a:endParaRPr lang="en-GB" sz="4400" dirty="0">
               <a:solidFill>
@@ -4863,7 +4863,7 @@
             <a:pPr algn="ctr"/>
             <a:r>
               <a:rPr lang="en-GB" sz="9600" dirty="0"/>
-              <a:t>0.11 × 0.19</a:t>
+              <a:t>0,11 × 0,19</a:t>
             </a:r>
           </a:p>
         </p:txBody>
@@ -5363,7 +5363,7 @@
                   <a:schemeClr val="tx1"/>
                 </a:solidFill>
               </a:rPr>
-              <a:t>0.32</a:t>
+              <a:t>0,32</a:t>
             </a:r>
             <a:endParaRPr lang="en-GB" sz="4400" dirty="0">
               <a:solidFill>
@@ -5465,7 +5465,7 @@
             <a:pPr algn="ctr"/>
             <a:r>
               <a:rPr lang="en-GB" sz="9600" dirty="0"/>
-              <a:t>1.6 × 0.2</a:t>
+              <a:t>1,6 × 0,2</a:t>
             </a:r>
           </a:p>
         </p:txBody>
@@ -5960,7 +5960,7 @@
                   <a:schemeClr val="tx1"/>
                 </a:solidFill>
               </a:rPr>
-              <a:t>1.56</a:t>
+              <a:t>1,56</a:t>
             </a:r>
             <a:endParaRPr lang="en-GB" sz="4400" dirty="0">
               <a:solidFill>
@@ -6062,7 +6062,7 @@
             <a:pPr algn="ctr"/>
             <a:r>
               <a:rPr lang="en-GB" sz="9600" dirty="0"/>
-              <a:t>1.2 × 1.3</a:t>
+              <a:t>1,2 × 1,3</a:t>
             </a:r>
           </a:p>
         </p:txBody>
@@ -6562,7 +6562,7 @@
                   <a:schemeClr val="tx1"/>
                 </a:solidFill>
               </a:rPr>
-              <a:t>2.56</a:t>
+              <a:t>2,56</a:t>
             </a:r>
             <a:endParaRPr lang="en-GB" sz="4400" dirty="0">
               <a:solidFill>
@@ -6664,7 +6664,7 @@
             <a:pPr algn="ctr"/>
             <a:r>
               <a:rPr lang="en-GB" sz="9600" dirty="0"/>
-              <a:t>0.8 × 3.2</a:t>
+              <a:t>0,8 × 3,2</a:t>
             </a:r>
           </a:p>
         </p:txBody>
@@ -7164,7 +7164,7 @@
                   <a:schemeClr val="tx1"/>
                 </a:solidFill>
               </a:rPr>
-              <a:t>0.104</a:t>
+              <a:t>0,104</a:t>
             </a:r>
           </a:p>
         </p:txBody>
@@ -7261,7 +7261,7 @@
             <a:pPr algn="ctr"/>
             <a:r>
               <a:rPr lang="en-GB" sz="9600" dirty="0"/>
-              <a:t>0.26 × 0.4</a:t>
+              <a:t>0,26 × 0,4</a:t>
             </a:r>
           </a:p>
         </p:txBody>
@@ -7761,7 +7761,7 @@
                   <a:schemeClr val="tx1"/>
                 </a:solidFill>
               </a:rPr>
-              <a:t>0.0264</a:t>
+              <a:t>0,0264</a:t>
             </a:r>
             <a:endParaRPr lang="en-GB" sz="4400" dirty="0">
               <a:solidFill>
@@ -7863,7 +7863,7 @@
             <a:pPr algn="ctr"/>
             <a:r>
               <a:rPr lang="en-GB" sz="9600" dirty="0"/>
-              <a:t>0.24 × 0.11</a:t>
+              <a:t>0,24 × 0,11</a:t>
             </a:r>
           </a:p>
         </p:txBody>
@@ -8363,7 +8363,7 @@
                   <a:schemeClr val="tx1"/>
                 </a:solidFill>
               </a:rPr>
-              <a:t>0.054</a:t>
+              <a:t>0,054</a:t>
             </a:r>
             <a:endParaRPr lang="en-GB" sz="4400" dirty="0">
               <a:solidFill>
@@ -8465,7 +8465,7 @@
             <a:pPr algn="ctr"/>
             <a:r>
               <a:rPr lang="en-GB" sz="9600" dirty="0"/>
-              <a:t>0.3 × 0.18</a:t>
+              <a:t>0,3 × 0,18</a:t>
             </a:r>
           </a:p>
         </p:txBody>
@@ -8965,7 +8965,7 @@
                   <a:schemeClr val="tx1"/>
                 </a:solidFill>
               </a:rPr>
-              <a:t>0.84</a:t>
+              <a:t>0,84</a:t>
             </a:r>
           </a:p>
         </p:txBody>
@@ -9062,7 +9062,7 @@
             <a:pPr algn="ctr"/>
             <a:r>
               <a:rPr lang="en-GB" sz="9600" dirty="0"/>
-              <a:t>2.1 × 0.4</a:t>
+              <a:t>2,1 × 0,4</a:t>
             </a:r>
           </a:p>
         </p:txBody>
@@ -9562,7 +9562,7 @@
                   <a:schemeClr val="tx1"/>
                 </a:solidFill>
               </a:rPr>
-              <a:t>0.0124</a:t>
+              <a:t>0,0124</a:t>
             </a:r>
             <a:endParaRPr lang="en-GB" sz="4400" dirty="0">
               <a:solidFill>
@@ -9664,7 +9664,7 @@
             <a:pPr algn="ctr"/>
             <a:r>
               <a:rPr lang="en-GB" sz="9600" dirty="0"/>
-              <a:t>0.62 × 0.02</a:t>
+              <a:t>0,62 × 0,02</a:t>
             </a:r>
           </a:p>
         </p:txBody>
@@ -10164,7 +10164,7 @@
                   <a:schemeClr val="tx1"/>
                 </a:solidFill>
               </a:rPr>
-              <a:t>2.52</a:t>
+              <a:t>2,52</a:t>
             </a:r>
           </a:p>
         </p:txBody>
@@ -10261,7 +10261,7 @@
             <a:pPr algn="ctr"/>
             <a:r>
               <a:rPr lang="en-GB" sz="9600" dirty="0"/>
-              <a:t>2.1 × 1.2</a:t>
+              <a:t>2,1 × 1,2</a:t>
             </a:r>
           </a:p>
         </p:txBody>
@@ -11903,7 +11903,7 @@
                   <a:schemeClr val="tx1"/>
                 </a:solidFill>
               </a:rPr>
-              <a:t>0.114</a:t>
+              <a:t>0,114</a:t>
             </a:r>
             <a:endParaRPr lang="en-GB" sz="4400" dirty="0">
               <a:solidFill>
@@ -12005,7 +12005,7 @@
             <a:pPr algn="ctr"/>
             <a:r>
               <a:rPr lang="en-GB" sz="9600" dirty="0"/>
-              <a:t>0.19 × 0.6</a:t>
+              <a:t>0,19 × 0,6</a:t>
             </a:r>
           </a:p>
         </p:txBody>
@@ -21831,7 +21831,7 @@
             <a:pPr algn="ctr"/>
             <a:r>
               <a:rPr lang="en-GB" sz="9600" dirty="0"/>
-              <a:t>1.8 × 0.9</a:t>
+              <a:t>1,8 × 0,9</a:t>
             </a:r>
           </a:p>
         </p:txBody>
@@ -22331,7 +22331,7 @@
                   <a:schemeClr val="tx1"/>
                 </a:solidFill>
               </a:rPr>
-              <a:t>0.102</a:t>
+              <a:t>0,102</a:t>
             </a:r>
             <a:endParaRPr lang="en-GB" sz="4400" dirty="0">
               <a:solidFill>
@@ -22433,7 +22433,7 @@
             <a:pPr algn="ctr"/>
             <a:r>
               <a:rPr lang="en-GB" sz="9600" dirty="0"/>
-              <a:t>0.17 × 0.6</a:t>
+              <a:t>0,17 × 0,6</a:t>
             </a:r>
           </a:p>
         </p:txBody>
@@ -22933,7 +22933,7 @@
                   <a:schemeClr val="tx1"/>
                 </a:solidFill>
               </a:rPr>
-              <a:t>1.82</a:t>
+              <a:t>1,82</a:t>
             </a:r>
             <a:endParaRPr lang="en-GB" sz="4400" dirty="0">
               <a:solidFill>
@@ -23035,7 +23035,7 @@
             <a:pPr algn="ctr"/>
             <a:r>
               <a:rPr lang="en-GB" sz="9600" dirty="0"/>
-              <a:t>2.6 × 0.7</a:t>
+              <a:t>2,6 × 0,7</a:t>
             </a:r>
           </a:p>
         </p:txBody>
@@ -23535,7 +23535,7 @@
                   <a:schemeClr val="tx1"/>
                 </a:solidFill>
               </a:rPr>
-              <a:t>0.0216</a:t>
+              <a:t>0,0216</a:t>
             </a:r>
             <a:endParaRPr lang="en-GB" sz="4400" dirty="0">
               <a:solidFill>
@@ -23637,7 +23637,7 @@
             <a:pPr algn="ctr"/>
             <a:r>
               <a:rPr lang="en-GB" sz="9600" dirty="0"/>
-              <a:t>0.12 × 0.18</a:t>
+              <a:t>0,12 × 0,18</a:t>
             </a:r>
           </a:p>
         </p:txBody>
@@ -24137,7 +24137,7 @@
                   <a:schemeClr val="tx1"/>
                 </a:solidFill>
               </a:rPr>
-              <a:t>0.168</a:t>
+              <a:t>0,168</a:t>
             </a:r>
             <a:endParaRPr lang="en-GB" sz="4400" dirty="0">
               <a:solidFill>
@@ -24239,7 +24239,7 @@
             <a:pPr algn="ctr"/>
             <a:r>
               <a:rPr lang="en-GB" sz="9600" dirty="0"/>
-              <a:t>0.7 × 0.24</a:t>
+              <a:t>0,7 × 0,24</a:t>
             </a:r>
           </a:p>
         </p:txBody>
